--- a/curriculum/M01/W03/L02/slides.pptx
+++ b/curriculum/M01/W03/L02/slides.pptx
@@ -15407,29 +15407,7 @@
                 <a:ea typeface="Malgun Gothic"/>
                 <a:cs typeface="Malgun Gothic"/>
               </a:rPr>
-              <a:t>: 어떤 신경과 호르몬이 작동해 이 행동이 나오는가. 봄에 길어진 낮이 송과체의 melatonin 분비를 줄이고 생식축이 활성화되어 노래 중추가 커진다. 2. </a:t>
-            </a:r>
-            <a:r>
-              <a:rPr sz="1400" b="1" i="0">
-                <a:solidFill>
-                  <a:srgbClr val="11202B"/>
-                </a:solidFill>
-                <a:latin typeface="Malgun Gothic"/>
-                <a:ea typeface="Malgun Gothic"/>
-                <a:cs typeface="Malgun Gothic"/>
-              </a:rPr>
-              <a:t>발달</a:t>
-            </a:r>
-            <a:r>
-              <a:rPr sz="1400" b="0" i="0">
-                <a:solidFill>
-                  <a:srgbClr val="11202B"/>
-                </a:solidFill>
-                <a:latin typeface="Malgun Gothic"/>
-                <a:ea typeface="Malgun Gothic"/>
-                <a:cs typeface="Malgun Gothic"/>
-              </a:rPr>
-              <a:t>: 개체가 살아오면서 이 행동이 어떻게 갖추어졌는가. 어린 새가 결정적 시기에 들은 노래를 기억했다가 자기 소리를 그것에 맞춰 간다.</a:t>
+              <a:t>: 어떤 신경과 호르몬이 작동해 이 행동이 나오는가. 봄에 길어진 낮이 송과체의 melatonin 분비를 줄이고 생식축이 활성화되어 노래 중추가 커진다.</a:t>
             </a:r>
           </a:p>
           <a:p>
@@ -15450,6 +15428,17 @@
               <a:t>•  </a:t>
             </a:r>
             <a:r>
+              <a:rPr sz="1400" b="0" i="0">
+                <a:solidFill>
+                  <a:srgbClr val="11202B"/>
+                </a:solidFill>
+                <a:latin typeface="Malgun Gothic"/>
+                <a:ea typeface="Malgun Gothic"/>
+                <a:cs typeface="Malgun Gothic"/>
+              </a:rPr>
+              <a:t>2. </a:t>
+            </a:r>
+            <a:r>
               <a:rPr sz="1400" b="1" i="0">
                 <a:solidFill>
                   <a:srgbClr val="11202B"/>
@@ -15458,7 +15447,7 @@
                 <a:ea typeface="Malgun Gothic"/>
                 <a:cs typeface="Malgun Gothic"/>
               </a:rPr>
-              <a:t>궁극 원인(ultimate cause)</a:t>
+              <a:t>발달</a:t>
             </a:r>
             <a:r>
               <a:rPr sz="1400" b="0" i="0">
@@ -15469,7 +15458,7 @@
                 <a:ea typeface="Malgun Gothic"/>
                 <a:cs typeface="Malgun Gothic"/>
               </a:rPr>
-              <a:t> — 왜 이 종에 이런 행동이 있는가.</a:t>
+              <a:t>: 개체가 살아오면서 이 행동이 어떻게 갖추어졌는가. 어린 새가 결정적 시기에 들은 노래를 기억했다가 자기 소리를 그것에 맞춰 간다.</a:t>
             </a:r>
           </a:p>
           <a:p>
@@ -15490,6 +15479,17 @@
               <a:t>•  </a:t>
             </a:r>
             <a:r>
+              <a:rPr sz="1400" b="1" i="0">
+                <a:solidFill>
+                  <a:srgbClr val="11202B"/>
+                </a:solidFill>
+                <a:latin typeface="Malgun Gothic"/>
+                <a:ea typeface="Malgun Gothic"/>
+                <a:cs typeface="Malgun Gothic"/>
+              </a:rPr>
+              <a:t>궁극 원인(ultimate cause)</a:t>
+            </a:r>
+            <a:r>
               <a:rPr sz="1400" b="0" i="0">
                 <a:solidFill>
                   <a:srgbClr val="11202B"/>
@@ -15498,11 +15498,40 @@
                 <a:ea typeface="Malgun Gothic"/>
                 <a:cs typeface="Malgun Gothic"/>
               </a:rPr>
-              <a:t>3. </a:t>
-            </a:r>
+              <a:t> — 왜 이 종에 이런 행동이 있는가.</a:t>
+            </a:r>
+          </a:p>
+          <a:p>
+            <a:pPr>
+              <a:spcAft>
+                <a:spcPts val="900"/>
+              </a:spcAft>
+            </a:pPr>
             <a:r>
               <a:rPr sz="1400" b="1" i="0">
                 <a:solidFill>
+                  <a:srgbClr val="F2B705"/>
+                </a:solidFill>
+                <a:latin typeface="Malgun Gothic"/>
+                <a:ea typeface="Malgun Gothic"/>
+                <a:cs typeface="Malgun Gothic"/>
+              </a:rPr>
+              <a:t>•  </a:t>
+            </a:r>
+            <a:r>
+              <a:rPr sz="1400" b="0" i="0">
+                <a:solidFill>
+                  <a:srgbClr val="11202B"/>
+                </a:solidFill>
+                <a:latin typeface="Malgun Gothic"/>
+                <a:ea typeface="Malgun Gothic"/>
+                <a:cs typeface="Malgun Gothic"/>
+              </a:rPr>
+              <a:t>1. </a:t>
+            </a:r>
+            <a:r>
+              <a:rPr sz="1400" b="1" i="0">
+                <a:solidFill>
                   <a:srgbClr val="11202B"/>
                 </a:solidFill>
                 <a:latin typeface="Malgun Gothic"/>
@@ -15520,7 +15549,36 @@
                 <a:ea typeface="Malgun Gothic"/>
                 <a:cs typeface="Malgun Gothic"/>
               </a:rPr>
-              <a:t>: 이 행동이 생존과 번식에 어떤 이득을 주는가. 노래가 영역을 알리고 짝을 끌어들인다. 4. </a:t>
+              <a:t>: 이 행동이 생존과 번식에 어떤 이득을 주는가. 노래가 영역을 알리고 짝을 끌어들인다.</a:t>
+            </a:r>
+          </a:p>
+          <a:p>
+            <a:pPr>
+              <a:spcAft>
+                <a:spcPts val="900"/>
+              </a:spcAft>
+            </a:pPr>
+            <a:r>
+              <a:rPr sz="1400" b="1" i="0">
+                <a:solidFill>
+                  <a:srgbClr val="F2B705"/>
+                </a:solidFill>
+                <a:latin typeface="Malgun Gothic"/>
+                <a:ea typeface="Malgun Gothic"/>
+                <a:cs typeface="Malgun Gothic"/>
+              </a:rPr>
+              <a:t>•  </a:t>
+            </a:r>
+            <a:r>
+              <a:rPr sz="1400" b="0" i="0">
+                <a:solidFill>
+                  <a:srgbClr val="11202B"/>
+                </a:solidFill>
+                <a:latin typeface="Malgun Gothic"/>
+                <a:ea typeface="Malgun Gothic"/>
+                <a:cs typeface="Malgun Gothic"/>
+              </a:rPr>
+              <a:t>2. </a:t>
             </a:r>
             <a:r>
               <a:rPr sz="1400" b="1" i="0">

--- a/curriculum/M01/W03/L02/slides.pptx
+++ b/curriculum/M01/W03/L02/slides.pptx
@@ -14463,7 +14463,7 @@
                 <a:ea typeface="Malgun Gothic"/>
                 <a:cs typeface="Malgun Gothic"/>
               </a:rPr>
-              <a:t>M01-W02-L02 내분비계 요약 — 시상하부와 뇌하수체, 음성 되먹임</a:t>
+              <a:t>M01-W02-L02 내분비계 요약: 호르몬과 되먹임 — 시상하부와 뇌하수체, 음성 되먹임</a:t>
             </a:r>
           </a:p>
           <a:p>
@@ -14492,7 +14492,7 @@
                 <a:ea typeface="Malgun Gothic"/>
                 <a:cs typeface="Malgun Gothic"/>
               </a:rPr>
-              <a:t>M01-W03-L01 발생 요약 — 신경관과 신경능, 결정적 시기</a:t>
+              <a:t>M01-W03-L01 발생 요약: 수정·배엽·기관 형성 — 신경관과 신경능, 결정적 시기</a:t>
             </a:r>
           </a:p>
           <a:p>

--- a/curriculum/M01/W03/L02/slides.pptx
+++ b/curriculum/M01/W03/L02/slides.pptx
@@ -4104,6 +4104,35 @@
             <a:spAutoFit/>
           </a:bodyPr>
           <a:lstStyle/>
+          <a:p>
+            <a:pPr>
+              <a:spcAft>
+                <a:spcPts val="900"/>
+              </a:spcAft>
+            </a:pPr>
+            <a:r>
+              <a:rPr sz="1400" b="1" i="0">
+                <a:solidFill>
+                  <a:srgbClr val="F2B705"/>
+                </a:solidFill>
+                <a:latin typeface="Malgun Gothic"/>
+                <a:ea typeface="Malgun Gothic"/>
+                <a:cs typeface="Malgun Gothic"/>
+              </a:rPr>
+              <a:t>•  </a:t>
+            </a:r>
+            <a:r>
+              <a:rPr sz="1400" b="0" i="0">
+                <a:solidFill>
+                  <a:srgbClr val="11202B"/>
+                </a:solidFill>
+                <a:latin typeface="Malgun Gothic"/>
+                <a:ea typeface="Malgun Gothic"/>
+                <a:cs typeface="Malgun Gothic"/>
+              </a:rPr>
+              <a:t>앞 절에서 신호가 한 세포 안에서는 전기로, 세포 사이에서는 화학으로 전달된다는 것을 보았다. 그런데 신경세포 하나만으로는 행동이 나오지 않는다. 수백억 개의 세포가 정해진 구조로 묶여 있어야 한다. 감각에서 행동까지의 사슬을 따라가기 전에, 그 사슬이 놓인 지도를 먼저 펼쳐 둔다.</a:t>
+            </a:r>
+          </a:p>
           <a:p>
             <a:pPr>
               <a:spcAft>
@@ -6309,6 +6338,57 @@
                 <a:ea typeface="Malgun Gothic"/>
                 <a:cs typeface="Malgun Gothic"/>
               </a:rPr>
+              <a:t>구조를 세웠으니 이제 사슬의 첫 칸, 즉 </a:t>
+            </a:r>
+            <a:r>
+              <a:rPr sz="1400" b="1" i="0">
+                <a:solidFill>
+                  <a:srgbClr val="11202B"/>
+                </a:solidFill>
+                <a:latin typeface="Malgun Gothic"/>
+                <a:ea typeface="Malgun Gothic"/>
+                <a:cs typeface="Malgun Gothic"/>
+              </a:rPr>
+              <a:t>입력</a:t>
+            </a:r>
+            <a:r>
+              <a:rPr sz="1400" b="0" i="0">
+                <a:solidFill>
+                  <a:srgbClr val="11202B"/>
+                </a:solidFill>
+                <a:latin typeface="Malgun Gothic"/>
+                <a:ea typeface="Malgun Gothic"/>
+                <a:cs typeface="Malgun Gothic"/>
+              </a:rPr>
+              <a:t>으로 들어간다. 빛과 소리와 냄새는 물리적으로 전혀 다른 것인데, 신경계는 그 모두를 같은 종류의 전기 신호로 바꾸어 처리한다. 어떻게 그것이 가능한가. 이 절은 감각마다 다른 세부로 들어가기 전에 모든 감각이 공유하는 네 단계를 먼저 세운다.</a:t>
+            </a:r>
+          </a:p>
+          <a:p>
+            <a:pPr>
+              <a:spcAft>
+                <a:spcPts val="900"/>
+              </a:spcAft>
+            </a:pPr>
+            <a:r>
+              <a:rPr sz="1400" b="1" i="0">
+                <a:solidFill>
+                  <a:srgbClr val="F2B705"/>
+                </a:solidFill>
+                <a:latin typeface="Malgun Gothic"/>
+                <a:ea typeface="Malgun Gothic"/>
+                <a:cs typeface="Malgun Gothic"/>
+              </a:rPr>
+              <a:t>•  </a:t>
+            </a:r>
+            <a:r>
+              <a:rPr sz="1400" b="0" i="0">
+                <a:solidFill>
+                  <a:srgbClr val="11202B"/>
+                </a:solidFill>
+                <a:latin typeface="Malgun Gothic"/>
+                <a:ea typeface="Malgun Gothic"/>
+                <a:cs typeface="Malgun Gothic"/>
+              </a:rPr>
               <a:t>감각은 종류가 다양하지만 작동 원리는 같은 틀을 공유한다. 네 가지로 정리된다.</a:t>
             </a:r>
           </a:p>
@@ -7122,7 +7202,7 @@
               </a:spcAft>
             </a:pPr>
             <a:r>
-              <a:rPr sz="2000" b="1" i="0">
+              <a:rPr sz="1800" b="1" i="0">
                 <a:solidFill>
                   <a:srgbClr val="F2B705"/>
                 </a:solidFill>
@@ -7133,48 +7213,15 @@
               <a:t>•  </a:t>
             </a:r>
             <a:r>
-              <a:rPr sz="2000" b="1" i="0">
-                <a:solidFill>
-                  <a:srgbClr val="11202B"/>
-                </a:solidFill>
-                <a:latin typeface="Malgun Gothic"/>
-                <a:ea typeface="Malgun Gothic"/>
-                <a:cs typeface="Malgun Gothic"/>
-              </a:rPr>
-              <a:t>눈의 광학.</a:t>
-            </a:r>
-            <a:r>
-              <a:rPr sz="2000" b="0" i="0">
-                <a:solidFill>
-                  <a:srgbClr val="11202B"/>
-                </a:solidFill>
-                <a:latin typeface="Malgun Gothic"/>
-                <a:ea typeface="Malgun Gothic"/>
-                <a:cs typeface="Malgun Gothic"/>
-              </a:rPr>
-              <a:t> 각막과 수정체가 빛을 굴절시켜 망막에 상을 맺는다. 굴절력의 대부분(약 3분의 2)은 각막이 담당하고, 수정체는 모양을 바꾸어 </a:t>
-            </a:r>
-            <a:r>
-              <a:rPr sz="2000" b="1" i="0">
-                <a:solidFill>
-                  <a:srgbClr val="11202B"/>
-                </a:solidFill>
-                <a:latin typeface="Malgun Gothic"/>
-                <a:ea typeface="Malgun Gothic"/>
-                <a:cs typeface="Malgun Gothic"/>
-              </a:rPr>
-              <a:t>초점을 조절</a:t>
-            </a:r>
-            <a:r>
-              <a:rPr sz="2000" b="0" i="0">
-                <a:solidFill>
-                  <a:srgbClr val="11202B"/>
-                </a:solidFill>
-                <a:latin typeface="Malgun Gothic"/>
-                <a:ea typeface="Malgun Gothic"/>
-                <a:cs typeface="Malgun Gothic"/>
-              </a:rPr>
-              <a:t>한다. 가까운 것을 볼 때 모양체근이 수축하면 걸이인대가 느슨해지고 수정체가 자기 탄성으로 두꺼워진다. 나이가 들면 수정체가 굳어 이 조절이 안 되는 것이 노안이다.</a:t>
+              <a:rPr sz="1800" b="0" i="0">
+                <a:solidFill>
+                  <a:srgbClr val="11202B"/>
+                </a:solidFill>
+                <a:latin typeface="Malgun Gothic"/>
+                <a:ea typeface="Malgun Gothic"/>
+                <a:cs typeface="Malgun Gothic"/>
+              </a:rPr>
+              <a:t>앞 절의 네 단계를 실제 감각에 하나씩 적용해 볼 차례다. 시각부터 보는 이유는 그 네 단계가 가장 분명하게 나뉘어 보이기 때문이다. 빛을 모으는 일(광학), 전기로 바꾸는 일(전환), 그리고 그 결과를 처리하는 일(부호화)이 해부학적으로도 서로 다른 자리에서 일어난다.</a:t>
             </a:r>
           </a:p>
           <a:p>
@@ -7184,7 +7231,7 @@
               </a:spcAft>
             </a:pPr>
             <a:r>
-              <a:rPr sz="2000" b="1" i="0">
+              <a:rPr sz="1800" b="1" i="0">
                 <a:solidFill>
                   <a:srgbClr val="F2B705"/>
                 </a:solidFill>
@@ -7195,7 +7242,69 @@
               <a:t>•  </a:t>
             </a:r>
             <a:r>
-              <a:rPr sz="2000" b="1" i="0">
+              <a:rPr sz="1800" b="1" i="0">
+                <a:solidFill>
+                  <a:srgbClr val="11202B"/>
+                </a:solidFill>
+                <a:latin typeface="Malgun Gothic"/>
+                <a:ea typeface="Malgun Gothic"/>
+                <a:cs typeface="Malgun Gothic"/>
+              </a:rPr>
+              <a:t>눈의 광학.</a:t>
+            </a:r>
+            <a:r>
+              <a:rPr sz="1800" b="0" i="0">
+                <a:solidFill>
+                  <a:srgbClr val="11202B"/>
+                </a:solidFill>
+                <a:latin typeface="Malgun Gothic"/>
+                <a:ea typeface="Malgun Gothic"/>
+                <a:cs typeface="Malgun Gothic"/>
+              </a:rPr>
+              <a:t> 각막과 수정체가 빛을 굴절시켜 망막에 상을 맺는다. 굴절력의 대부분(약 3분의 2)은 각막이 담당하고, 수정체는 모양을 바꾸어 </a:t>
+            </a:r>
+            <a:r>
+              <a:rPr sz="1800" b="1" i="0">
+                <a:solidFill>
+                  <a:srgbClr val="11202B"/>
+                </a:solidFill>
+                <a:latin typeface="Malgun Gothic"/>
+                <a:ea typeface="Malgun Gothic"/>
+                <a:cs typeface="Malgun Gothic"/>
+              </a:rPr>
+              <a:t>초점을 조절</a:t>
+            </a:r>
+            <a:r>
+              <a:rPr sz="1800" b="0" i="0">
+                <a:solidFill>
+                  <a:srgbClr val="11202B"/>
+                </a:solidFill>
+                <a:latin typeface="Malgun Gothic"/>
+                <a:ea typeface="Malgun Gothic"/>
+                <a:cs typeface="Malgun Gothic"/>
+              </a:rPr>
+              <a:t>한다. 가까운 것을 볼 때 모양체근이 수축하면 걸이인대가 느슨해지고 수정체가 자기 탄성으로 두꺼워진다. 나이가 들면 수정체가 굳어 이 조절이 안 되는 것이 노안이다.</a:t>
+            </a:r>
+          </a:p>
+          <a:p>
+            <a:pPr>
+              <a:spcAft>
+                <a:spcPts val="900"/>
+              </a:spcAft>
+            </a:pPr>
+            <a:r>
+              <a:rPr sz="1800" b="1" i="0">
+                <a:solidFill>
+                  <a:srgbClr val="F2B705"/>
+                </a:solidFill>
+                <a:latin typeface="Malgun Gothic"/>
+                <a:ea typeface="Malgun Gothic"/>
+                <a:cs typeface="Malgun Gothic"/>
+              </a:rPr>
+              <a:t>•  </a:t>
+            </a:r>
+            <a:r>
+              <a:rPr sz="1800" b="1" i="0">
                 <a:solidFill>
                   <a:srgbClr val="11202B"/>
                 </a:solidFill>
@@ -7206,7 +7315,7 @@
               <a:t>광수용기.</a:t>
             </a:r>
             <a:r>
-              <a:rPr sz="2000" b="0" i="0">
+              <a:rPr sz="1800" b="0" i="0">
                 <a:solidFill>
                   <a:srgbClr val="11202B"/>
                 </a:solidFill>
@@ -9122,6 +9231,57 @@
               <a:t>•  </a:t>
             </a:r>
             <a:r>
+              <a:rPr sz="1400" b="0" i="0">
+                <a:solidFill>
+                  <a:srgbClr val="11202B"/>
+                </a:solidFill>
+                <a:latin typeface="Malgun Gothic"/>
+                <a:ea typeface="Malgun Gothic"/>
+                <a:cs typeface="Malgun Gothic"/>
+              </a:rPr>
+              <a:t>시각에서는 빛이라는 에너지를 바로 분자 변화로 바꾸었다. 그런데 소리는 공기의 떨림, 즉 </a:t>
+            </a:r>
+            <a:r>
+              <a:rPr sz="1400" b="1" i="0">
+                <a:solidFill>
+                  <a:srgbClr val="11202B"/>
+                </a:solidFill>
+                <a:latin typeface="Malgun Gothic"/>
+                <a:ea typeface="Malgun Gothic"/>
+                <a:cs typeface="Malgun Gothic"/>
+              </a:rPr>
+              <a:t>기계적 운동</a:t>
+            </a:r>
+            <a:r>
+              <a:rPr sz="1400" b="0" i="0">
+                <a:solidFill>
+                  <a:srgbClr val="11202B"/>
+                </a:solidFill>
+                <a:latin typeface="Malgun Gothic"/>
+                <a:ea typeface="Malgun Gothic"/>
+                <a:cs typeface="Malgun Gothic"/>
+              </a:rPr>
+              <a:t>이다. 운동을 전기로 바꾸려면 전혀 다른 장치가 필요하다. 이 절은 그 장치를 다루며, 같은 원리가 몸의 기울기를 감지하는 평형 감각에도 쓰인다는 점을 함께 본다.</a:t>
+            </a:r>
+          </a:p>
+          <a:p>
+            <a:pPr>
+              <a:spcAft>
+                <a:spcPts val="900"/>
+              </a:spcAft>
+            </a:pPr>
+            <a:r>
+              <a:rPr sz="1400" b="1" i="0">
+                <a:solidFill>
+                  <a:srgbClr val="F2B705"/>
+                </a:solidFill>
+                <a:latin typeface="Malgun Gothic"/>
+                <a:ea typeface="Malgun Gothic"/>
+                <a:cs typeface="Malgun Gothic"/>
+              </a:rPr>
+              <a:t>•  </a:t>
+            </a:r>
+            <a:r>
               <a:rPr sz="1400" b="1" i="0">
                 <a:solidFill>
                   <a:srgbClr val="11202B"/>
@@ -10698,6 +10858,57 @@
               <a:t>•  </a:t>
             </a:r>
             <a:r>
+              <a:rPr sz="1400" b="0" i="0">
+                <a:solidFill>
+                  <a:srgbClr val="11202B"/>
+                </a:solidFill>
+                <a:latin typeface="Malgun Gothic"/>
+                <a:ea typeface="Malgun Gothic"/>
+                <a:cs typeface="Malgun Gothic"/>
+              </a:rPr>
+              <a:t>앞의 두 감각은 물리 에너지를 받아들였다. 남은 것은 </a:t>
+            </a:r>
+            <a:r>
+              <a:rPr sz="1400" b="1" i="0">
+                <a:solidFill>
+                  <a:srgbClr val="11202B"/>
+                </a:solidFill>
+                <a:latin typeface="Malgun Gothic"/>
+                <a:ea typeface="Malgun Gothic"/>
+                <a:cs typeface="Malgun Gothic"/>
+              </a:rPr>
+              <a:t>분자 자체를 알아보는</a:t>
+            </a:r>
+            <a:r>
+              <a:rPr sz="1400" b="0" i="0">
+                <a:solidFill>
+                  <a:srgbClr val="11202B"/>
+                </a:solidFill>
+                <a:latin typeface="Malgun Gothic"/>
+                <a:ea typeface="Malgun Gothic"/>
+                <a:cs typeface="Malgun Gothic"/>
+              </a:rPr>
+              <a:t> 감각이다. 여기서 문제의 성격이 달라진다. 빛의 파장은 하나의 축 위에 놓이지만 냄새 분자는 수만 가지이고 서로 줄을 세울 수 없다. 끝없이 다양한 분자를 한정된 수용체로 어떻게 구별하는가가 이 절의 질문이다.</a:t>
+            </a:r>
+          </a:p>
+          <a:p>
+            <a:pPr>
+              <a:spcAft>
+                <a:spcPts val="900"/>
+              </a:spcAft>
+            </a:pPr>
+            <a:r>
+              <a:rPr sz="1400" b="1" i="0">
+                <a:solidFill>
+                  <a:srgbClr val="F2B705"/>
+                </a:solidFill>
+                <a:latin typeface="Malgun Gothic"/>
+                <a:ea typeface="Malgun Gothic"/>
+                <a:cs typeface="Malgun Gothic"/>
+              </a:rPr>
+              <a:t>•  </a:t>
+            </a:r>
+            <a:r>
               <a:rPr sz="1400" b="1" i="0">
                 <a:solidFill>
                   <a:srgbClr val="11202B"/>
@@ -11899,7 +12110,7 @@
               </a:spcAft>
             </a:pPr>
             <a:r>
-              <a:rPr sz="1800" b="1" i="0">
+              <a:rPr sz="1600" b="1" i="0">
                 <a:solidFill>
                   <a:srgbClr val="F2B705"/>
                 </a:solidFill>
@@ -11910,48 +12121,37 @@
               <a:t>•  </a:t>
             </a:r>
             <a:r>
-              <a:rPr sz="1800" b="1" i="0">
-                <a:solidFill>
-                  <a:srgbClr val="11202B"/>
-                </a:solidFill>
-                <a:latin typeface="Malgun Gothic"/>
-                <a:ea typeface="Malgun Gothic"/>
-                <a:cs typeface="Malgun Gothic"/>
-              </a:rPr>
-              <a:t>반사궁.</a:t>
-            </a:r>
-            <a:r>
-              <a:rPr sz="1800" b="0" i="0">
-                <a:solidFill>
-                  <a:srgbClr val="11202B"/>
-                </a:solidFill>
-                <a:latin typeface="Malgun Gothic"/>
-                <a:ea typeface="Malgun Gothic"/>
-                <a:cs typeface="Malgun Gothic"/>
-              </a:rPr>
-              <a:t> 가장 단순한 감각–운동 연결이다. 다섯 요소로 이루어진다. 수용기, 구심성 신경, 중추의 연접, 원심성 신경, 효과기다. 무릎반사는 중간에 사이신경세포가 없는 </a:t>
-            </a:r>
-            <a:r>
-              <a:rPr sz="1800" b="1" i="0">
-                <a:solidFill>
-                  <a:srgbClr val="11202B"/>
-                </a:solidFill>
-                <a:latin typeface="Malgun Gothic"/>
-                <a:ea typeface="Malgun Gothic"/>
-                <a:cs typeface="Malgun Gothic"/>
-              </a:rPr>
-              <a:t>단일시냅스 반사</a:t>
-            </a:r>
-            <a:r>
-              <a:rPr sz="1800" b="0" i="0">
-                <a:solidFill>
-                  <a:srgbClr val="11202B"/>
-                </a:solidFill>
-                <a:latin typeface="Malgun Gothic"/>
-                <a:ea typeface="Malgun Gothic"/>
-                <a:cs typeface="Malgun Gothic"/>
-              </a:rPr>
-              <a:t>로, 근방추가 늘어남을 감지하면 같은 근육을 수축시킨다. 굴곡 반사처럼 사이신경세포를 거치는 다시냅스 반사는 느리지만 여러 근육을 조합할 수 있다.</a:t>
+              <a:rPr sz="1600" b="0" i="0">
+                <a:solidFill>
+                  <a:srgbClr val="11202B"/>
+                </a:solidFill>
+                <a:latin typeface="Malgun Gothic"/>
+                <a:ea typeface="Malgun Gothic"/>
+                <a:cs typeface="Malgun Gothic"/>
+              </a:rPr>
+              <a:t>여기까지가 사슬의 입력 쪽이었다. 이제 반대편 끝, 즉 </a:t>
+            </a:r>
+            <a:r>
+              <a:rPr sz="1600" b="1" i="0">
+                <a:solidFill>
+                  <a:srgbClr val="11202B"/>
+                </a:solidFill>
+                <a:latin typeface="Malgun Gothic"/>
+                <a:ea typeface="Malgun Gothic"/>
+                <a:cs typeface="Malgun Gothic"/>
+              </a:rPr>
+              <a:t>출력</a:t>
+            </a:r>
+            <a:r>
+              <a:rPr sz="1600" b="0" i="0">
+                <a:solidFill>
+                  <a:srgbClr val="11202B"/>
+                </a:solidFill>
+                <a:latin typeface="Malgun Gothic"/>
+                <a:ea typeface="Malgun Gothic"/>
+                <a:cs typeface="Malgun Gothic"/>
+              </a:rPr>
+              <a:t>으로 넘어간다. 가장 단순한 연결부터 보는 것이 순서다. 입력이 뇌를 거치지 않고 곧바로 출력으로 이어지는 경우가 있고, 그 구조를 알면 더 복잡한 운동 조절이 거기에 무엇을 덧붙인 것인지 보인다.</a:t>
             </a:r>
           </a:p>
           <a:p>
@@ -11961,7 +12161,7 @@
               </a:spcAft>
             </a:pPr>
             <a:r>
-              <a:rPr sz="1800" b="1" i="0">
+              <a:rPr sz="1600" b="1" i="0">
                 <a:solidFill>
                   <a:srgbClr val="F2B705"/>
                 </a:solidFill>
@@ -11972,7 +12172,69 @@
               <a:t>•  </a:t>
             </a:r>
             <a:r>
-              <a:rPr sz="1800" b="0" i="0">
+              <a:rPr sz="1600" b="1" i="0">
+                <a:solidFill>
+                  <a:srgbClr val="11202B"/>
+                </a:solidFill>
+                <a:latin typeface="Malgun Gothic"/>
+                <a:ea typeface="Malgun Gothic"/>
+                <a:cs typeface="Malgun Gothic"/>
+              </a:rPr>
+              <a:t>반사궁.</a:t>
+            </a:r>
+            <a:r>
+              <a:rPr sz="1600" b="0" i="0">
+                <a:solidFill>
+                  <a:srgbClr val="11202B"/>
+                </a:solidFill>
+                <a:latin typeface="Malgun Gothic"/>
+                <a:ea typeface="Malgun Gothic"/>
+                <a:cs typeface="Malgun Gothic"/>
+              </a:rPr>
+              <a:t> 가장 단순한 감각–운동 연결이다. 다섯 요소로 이루어진다. 수용기, 구심성 신경, 중추의 연접, 원심성 신경, 효과기다. 무릎반사는 중간에 사이신경세포가 없는 </a:t>
+            </a:r>
+            <a:r>
+              <a:rPr sz="1600" b="1" i="0">
+                <a:solidFill>
+                  <a:srgbClr val="11202B"/>
+                </a:solidFill>
+                <a:latin typeface="Malgun Gothic"/>
+                <a:ea typeface="Malgun Gothic"/>
+                <a:cs typeface="Malgun Gothic"/>
+              </a:rPr>
+              <a:t>단일시냅스 반사</a:t>
+            </a:r>
+            <a:r>
+              <a:rPr sz="1600" b="0" i="0">
+                <a:solidFill>
+                  <a:srgbClr val="11202B"/>
+                </a:solidFill>
+                <a:latin typeface="Malgun Gothic"/>
+                <a:ea typeface="Malgun Gothic"/>
+                <a:cs typeface="Malgun Gothic"/>
+              </a:rPr>
+              <a:t>로, 근방추가 늘어남을 감지하면 같은 근육을 수축시킨다. 굴곡 반사처럼 사이신경세포를 거치는 다시냅스 반사는 느리지만 여러 근육을 조합할 수 있다.</a:t>
+            </a:r>
+          </a:p>
+          <a:p>
+            <a:pPr>
+              <a:spcAft>
+                <a:spcPts val="900"/>
+              </a:spcAft>
+            </a:pPr>
+            <a:r>
+              <a:rPr sz="1600" b="1" i="0">
+                <a:solidFill>
+                  <a:srgbClr val="F2B705"/>
+                </a:solidFill>
+                <a:latin typeface="Malgun Gothic"/>
+                <a:ea typeface="Malgun Gothic"/>
+                <a:cs typeface="Malgun Gothic"/>
+              </a:rPr>
+              <a:t>•  </a:t>
+            </a:r>
+            <a:r>
+              <a:rPr sz="1600" b="0" i="0">
                 <a:solidFill>
                   <a:srgbClr val="11202B"/>
                 </a:solidFill>
@@ -11983,7 +12245,7 @@
               <a:t>반사가 임상적으로 쓰이는 이유는 </a:t>
             </a:r>
             <a:r>
-              <a:rPr sz="1800" b="1" i="0">
+              <a:rPr sz="1600" b="1" i="0">
                 <a:solidFill>
                   <a:srgbClr val="11202B"/>
                 </a:solidFill>
@@ -11994,7 +12256,7 @@
               <a:t>경로가 정해져 있기 때문</a:t>
             </a:r>
             <a:r>
-              <a:rPr sz="1800" b="0" i="0">
+              <a:rPr sz="1600" b="0" i="0">
                 <a:solidFill>
                   <a:srgbClr val="11202B"/>
                 </a:solidFill>
@@ -16558,6 +16820,57 @@
             <a:spAutoFit/>
           </a:bodyPr>
           <a:lstStyle/>
+          <a:p>
+            <a:pPr>
+              <a:spcAft>
+                <a:spcPts val="900"/>
+              </a:spcAft>
+            </a:pPr>
+            <a:r>
+              <a:rPr sz="1400" b="1" i="0">
+                <a:solidFill>
+                  <a:srgbClr val="F2B705"/>
+                </a:solidFill>
+                <a:latin typeface="Malgun Gothic"/>
+                <a:ea typeface="Malgun Gothic"/>
+                <a:cs typeface="Malgun Gothic"/>
+              </a:rPr>
+              <a:t>•  </a:t>
+            </a:r>
+            <a:r>
+              <a:rPr sz="1400" b="0" i="0">
+                <a:solidFill>
+                  <a:srgbClr val="11202B"/>
+                </a:solidFill>
+                <a:latin typeface="Malgun Gothic"/>
+                <a:ea typeface="Malgun Gothic"/>
+                <a:cs typeface="Malgun Gothic"/>
+              </a:rPr>
+              <a:t>앞 절에서 행동을 묻는 네 층위를 나누었다. 그 가운데 </a:t>
+            </a:r>
+            <a:r>
+              <a:rPr sz="1400" b="1" i="0">
+                <a:solidFill>
+                  <a:srgbClr val="11202B"/>
+                </a:solidFill>
+                <a:latin typeface="Malgun Gothic"/>
+                <a:ea typeface="Malgun Gothic"/>
+                <a:cs typeface="Malgun Gothic"/>
+              </a:rPr>
+              <a:t>기전</a:t>
+            </a:r>
+            <a:r>
+              <a:rPr sz="1400" b="0" i="0">
+                <a:solidFill>
+                  <a:srgbClr val="11202B"/>
+                </a:solidFill>
+                <a:latin typeface="Malgun Gothic"/>
+                <a:ea typeface="Malgun Gothic"/>
+                <a:cs typeface="Malgun Gothic"/>
+              </a:rPr>
+              <a:t>을 묻는 층위, 즉 "몸 안에서 무슨 일이 일어나기에 그 행동이 나오는가"가 이 수업 본문의 대부분을 차지한다. 기전을 따라가려면 가장 아래에서 시작해야 한다. 행동은 결국 근육이 움직인 결과이고, 근육을 움직이는 것은 신경세포가 보낸 신호다. 이 절은 그 신호가 무엇인지부터 세운다.</a:t>
+            </a:r>
+          </a:p>
           <a:p>
             <a:pPr>
               <a:spcAft>
